--- a/classes/parte-9-forense-digital-y-respuesta-a-incidentes/210-forense-de-navegadores-y-correo/clase-210-presentacion.pptx
+++ b/classes/parte-9-forense-digital-y-respuesta-a-incidentes/210-forense-de-navegadores-y-correo/clase-210-presentacion.pptx
@@ -17,6 +17,11 @@
     <p:sldId id="265" r:id="rId16"/>
     <p:sldId id="266" r:id="rId17"/>
     <p:sldId id="267" r:id="rId18"/>
+    <p:sldId id="268" r:id="rId19"/>
+    <p:sldId id="269" r:id="rId20"/>
+    <p:sldId id="270" r:id="rId21"/>
+    <p:sldId id="271" r:id="rId22"/>
+    <p:sldId id="272" r:id="rId23"/>
   </p:sldIdLst>
   <p:sldSz cx="9144000" cy="6858000" type="screen4x3"/>
   <p:notesSz cx="6858000" cy="9144000"/>
@@ -3198,7 +3203,7 @@
                   <a:srgbClr val="0B3D2E"/>
                 </a:solidFill>
               </a:rPr>
-              <a:t>⚠️ Errores comunes</a:t>
+              <a:t>🧰 Herramientas y preparación</a:t>
             </a:r>
           </a:p>
         </p:txBody>
@@ -3236,67 +3241,37 @@
                   <a:srgbClr val="22282E"/>
                 </a:solidFill>
               </a:rPr>
-              <a:t>•  database is locked — El navegador está abierto. Trabaja sobre una copia con el navegador cerrado.</a:t>
-            </a:r>
-          </a:p>
-          <a:p>
-            <a:pPr>
-              <a:spcAft>
-                <a:spcPts val="600"/>
-              </a:spcAft>
-            </a:pPr>
-            <a:r>
-              <a:rPr sz="1500">
-                <a:solidFill>
-                  <a:srgbClr val="22282E"/>
-                </a:solidFill>
-              </a:rPr>
-              <a:t>•  Timestamps sin sentido — Épocas distintas (WebKit vs. Unix). Convierte con la fórmula correcta.</a:t>
-            </a:r>
-          </a:p>
-          <a:p>
-            <a:pPr>
-              <a:spcAft>
-                <a:spcPts val="600"/>
-              </a:spcAft>
-            </a:pPr>
-            <a:r>
-              <a:rPr sz="1500">
-                <a:solidFill>
-                  <a:srgbClr val="22282E"/>
-                </a:solidFill>
-              </a:rPr>
-              <a:t>•  Encabezados Received confusos — Léelos de abajo hacia arriba; los de arriba pueden estar falsificados.</a:t>
-            </a:r>
-          </a:p>
-          <a:p>
-            <a:pPr>
-              <a:spcAft>
-                <a:spcPts val="600"/>
-              </a:spcAft>
-            </a:pPr>
-            <a:r>
-              <a:rPr sz="1500">
-                <a:solidFill>
-                  <a:srgbClr val="22282E"/>
-                </a:solidFill>
-              </a:rPr>
-              <a:t>•  SPF pasa pero igual es phishing — SPF valida el sobre, no el From visible. Revisa DKIM y DMARC.</a:t>
-            </a:r>
-          </a:p>
-          <a:p>
-            <a:pPr>
-              <a:spcAft>
-                <a:spcPts val="600"/>
-              </a:spcAft>
-            </a:pPr>
-            <a:r>
-              <a:rPr sz="1500">
-                <a:solidFill>
-                  <a:srgbClr val="22282E"/>
-                </a:solidFill>
-              </a:rPr>
-              <a:t>•  Adjunto peligroso — Nunca lo ejecutes. Solo hashea y analiza en aislamiento.</a:t>
+              <a:t>•  Navegadores: DB Browser for SQLite, herramientas de Eric Zimmerman, Hindsight (Chrome), nirsoft BrowsingHistoryView.</a:t>
+            </a:r>
+          </a:p>
+          <a:p>
+            <a:pPr>
+              <a:spcAft>
+                <a:spcPts val="600"/>
+              </a:spcAft>
+            </a:pPr>
+            <a:r>
+              <a:rPr sz="1500">
+                <a:solidFill>
+                  <a:srgbClr val="22282E"/>
+                </a:solidFill>
+              </a:rPr>
+              <a:t>•  Correo: libpff (PST), readpst, un visor de EML, y análisis manual de encabezados.</a:t>
+            </a:r>
+          </a:p>
+          <a:p>
+            <a:pPr>
+              <a:spcAft>
+                <a:spcPts val="600"/>
+              </a:spcAft>
+            </a:pPr>
+            <a:r>
+              <a:rPr sz="1500">
+                <a:solidFill>
+                  <a:srgbClr val="22282E"/>
+                </a:solidFill>
+              </a:rPr>
+              <a:t>•  Entorno: usa perfiles de navegador y correos PROPIOS. Si analizas un correo de phishing real recibido por ti, hazlo en entorno aislado y no abras los adjuntos.</a:t>
             </a:r>
           </a:p>
         </p:txBody>
@@ -3347,7 +3322,7 @@
                   <a:srgbClr val="0B3D2E"/>
                 </a:solidFill>
               </a:rPr>
-              <a:t>❓ Preguntas frecuentes</a:t>
+              <a:t>🧪 Laboratorio guiado</a:t>
             </a:r>
           </a:p>
         </p:txBody>
@@ -3385,97 +3360,97 @@
                   <a:srgbClr val="22282E"/>
                 </a:solidFill>
               </a:rPr>
-              <a:t>•  ❓ ¿Por qué timestamps raros en Chrome?</a:t>
-            </a:r>
-          </a:p>
-          <a:p>
-            <a:pPr>
-              <a:spcAft>
-                <a:spcPts val="600"/>
-              </a:spcAft>
-            </a:pPr>
-            <a:r>
-              <a:rPr sz="1500">
-                <a:solidFill>
-                  <a:srgbClr val="22282E"/>
-                </a:solidFill>
-              </a:rPr>
-              <a:t>•  Usa la época WebKit: microsegundos desde el 1 de enero de 1601. Hay que convertirla.</a:t>
-            </a:r>
-          </a:p>
-          <a:p>
-            <a:pPr>
-              <a:spcAft>
-                <a:spcPts val="600"/>
-              </a:spcAft>
-            </a:pPr>
-            <a:r>
-              <a:rPr sz="1500">
-                <a:solidFill>
-                  <a:srgbClr val="22282E"/>
-                </a:solidFill>
-              </a:rPr>
-              <a:t>•  ❓ ¿SPF suficiente contra spoofing?</a:t>
-            </a:r>
-          </a:p>
-          <a:p>
-            <a:pPr>
-              <a:spcAft>
-                <a:spcPts val="600"/>
-              </a:spcAft>
-            </a:pPr>
-            <a:r>
-              <a:rPr sz="1500">
-                <a:solidFill>
-                  <a:srgbClr val="22282E"/>
-                </a:solidFill>
-              </a:rPr>
-              <a:t>•  No. SPF valida el remitente del sobre (envelope), no el From que ve el usuario. DMARC alinea ambos; revísalo siempre.</a:t>
-            </a:r>
-          </a:p>
-          <a:p>
-            <a:pPr>
-              <a:spcAft>
-                <a:spcPts val="600"/>
-              </a:spcAft>
-            </a:pPr>
-            <a:r>
-              <a:rPr sz="1500">
-                <a:solidFill>
-                  <a:srgbClr val="22282E"/>
-                </a:solidFill>
-              </a:rPr>
-              <a:t>•  ❓ ¿Puedo recuperar correo borrado?</a:t>
-            </a:r>
-          </a:p>
-          <a:p>
-            <a:pPr>
-              <a:spcAft>
-                <a:spcPts val="600"/>
-              </a:spcAft>
-            </a:pPr>
-            <a:r>
-              <a:rPr sz="1500">
-                <a:solidFill>
-                  <a:srgbClr val="22282E"/>
-                </a:solidFill>
-              </a:rPr>
-              <a:t>•  A veces sí desde PST/OST (elementos recuperables) o desde el espacio no asignado con carving.</a:t>
-            </a:r>
-          </a:p>
-          <a:p>
-            <a:pPr>
-              <a:spcAft>
-                <a:spcPts val="600"/>
-              </a:spcAft>
-            </a:pPr>
-            <a:r>
-              <a:rPr sz="1500">
-                <a:solidFill>
-                  <a:srgbClr val="22282E"/>
-                </a:solidFill>
-              </a:rPr>
-              <a:t>•  ❓ ¿El modo incógnito deja rastro?</a:t>
+              <a:t>•  Copia (no abras el navegador en vivo) la base de historial de Chrome:</a:t>
+            </a:r>
+          </a:p>
+          <a:p>
+            <a:pPr>
+              <a:spcAft>
+                <a:spcPts val="600"/>
+              </a:spcAft>
+            </a:pPr>
+            <a:r>
+              <a:rPr sz="1500">
+                <a:solidFill>
+                  <a:srgbClr val="22282E"/>
+                </a:solidFill>
+              </a:rPr>
+              <a:t>•  Windows: %LOCALAPPDATA%\Google\Chrome\User Data\Default\History.</a:t>
+            </a:r>
+          </a:p>
+          <a:p>
+            <a:pPr>
+              <a:spcAft>
+                <a:spcPts val="600"/>
+              </a:spcAft>
+            </a:pPr>
+            <a:r>
+              <a:rPr sz="1500">
+                <a:solidFill>
+                  <a:srgbClr val="22282E"/>
+                </a:solidFill>
+              </a:rPr>
+              <a:t>•  Explora el historial con SQL:</a:t>
+            </a:r>
+          </a:p>
+          <a:p>
+            <a:pPr>
+              <a:spcAft>
+                <a:spcPts val="600"/>
+              </a:spcAft>
+            </a:pPr>
+            <a:r>
+              <a:rPr sz="1500">
+                <a:solidFill>
+                  <a:srgbClr val="22282E"/>
+                </a:solidFill>
+              </a:rPr>
+              <a:t>•  Convierte los timestamps WebKit a fecha legible (recuerda: microsegundos desde 1601).</a:t>
+            </a:r>
+          </a:p>
+          <a:p>
+            <a:pPr>
+              <a:spcAft>
+                <a:spcPts val="600"/>
+              </a:spcAft>
+            </a:pPr>
+            <a:r>
+              <a:rPr sz="1500">
+                <a:solidFill>
+                  <a:srgbClr val="22282E"/>
+                </a:solidFill>
+              </a:rPr>
+              <a:t>•  Analiza Firefox:</a:t>
+            </a:r>
+          </a:p>
+          <a:p>
+            <a:pPr>
+              <a:spcAft>
+                <a:spcPts val="600"/>
+              </a:spcAft>
+            </a:pPr>
+            <a:r>
+              <a:rPr sz="1500">
+                <a:solidFill>
+                  <a:srgbClr val="22282E"/>
+                </a:solidFill>
+              </a:rPr>
+              <a:t>•  Usa Hindsight para un informe consolidado de Chrome (historial, cookies, descargas, extensiones).</a:t>
+            </a:r>
+          </a:p>
+          <a:p>
+            <a:pPr>
+              <a:spcAft>
+                <a:spcPts val="600"/>
+              </a:spcAft>
+            </a:pPr>
+            <a:r>
+              <a:rPr sz="1500">
+                <a:solidFill>
+                  <a:srgbClr val="22282E"/>
+                </a:solidFill>
+              </a:rPr>
+              <a:t>•  Analiza un correo sospechoso propio (archivo .eml): abre los encabezados e identifica desde abajo el primer salto administrado por infraestructura confiable; separa relé observado de origen del…</a:t>
             </a:r>
           </a:p>
         </p:txBody>
@@ -3526,7 +3501,7 @@
                   <a:srgbClr val="0B3D2E"/>
                 </a:solidFill>
               </a:rPr>
-              <a:t>🔗 Referencias</a:t>
+              <a:t>✍️ Ejercicios</a:t>
             </a:r>
           </a:p>
         </p:txBody>
@@ -3564,56 +3539,772 @@
                   <a:srgbClr val="22282E"/>
                 </a:solidFill>
               </a:rPr>
-              <a:t>•  SANS — Windows Forensic Analysis (FOR500): &lt;https://www.sans.org/&gt;</a:t>
-            </a:r>
-          </a:p>
-          <a:p>
-            <a:pPr>
-              <a:spcAft>
-                <a:spcPts val="600"/>
-              </a:spcAft>
-            </a:pPr>
-            <a:r>
-              <a:rPr sz="1500">
-                <a:solidFill>
-                  <a:srgbClr val="22282E"/>
-                </a:solidFill>
-              </a:rPr>
-              <a:t>•  Hindsight (Chrome forensics): &lt;https://github.com/obsidianforensics/hindsight&gt;</a:t>
-            </a:r>
-          </a:p>
-          <a:p>
-            <a:pPr>
-              <a:spcAft>
-                <a:spcPts val="600"/>
-              </a:spcAft>
-            </a:pPr>
-            <a:r>
-              <a:rPr sz="1500">
-                <a:solidFill>
-                  <a:srgbClr val="22282E"/>
-                </a:solidFill>
-              </a:rPr>
-              <a:t>•  libpff (PST/OST): &lt;https://github.com/libyal/libpff&gt;</a:t>
-            </a:r>
-          </a:p>
-          <a:p>
-            <a:pPr>
-              <a:spcAft>
-                <a:spcPts val="600"/>
-              </a:spcAft>
-            </a:pPr>
-            <a:r>
-              <a:rPr sz="1500">
-                <a:solidFill>
-                  <a:srgbClr val="22282E"/>
-                </a:solidFill>
-              </a:rPr>
-              <a:t>•  RFC 5322 (formato de mensaje) y RFC 7208 (SPF): &lt;https://www.rfc-editor.org/&gt;</a:t>
-            </a:r>
-          </a:p>
-        </p:txBody>
-      </p:sp>
+              <a:t>•  Convierte tres timestamps WebKit a fecha UTC legible.</a:t>
+            </a:r>
+          </a:p>
+          <a:p>
+            <a:pPr>
+              <a:spcAft>
+                <a:spcPts val="600"/>
+              </a:spcAft>
+            </a:pPr>
+            <a:r>
+              <a:rPr sz="1500">
+                <a:solidFill>
+                  <a:srgbClr val="22282E"/>
+                </a:solidFill>
+              </a:rPr>
+              <a:t>•  Lista las diez URLs más visitadas de tu perfil.</a:t>
+            </a:r>
+          </a:p>
+          <a:p>
+            <a:pPr>
+              <a:spcAft>
+                <a:spcPts val="600"/>
+              </a:spcAft>
+            </a:pPr>
+            <a:r>
+              <a:rPr sz="1500">
+                <a:solidFill>
+                  <a:srgbClr val="22282E"/>
+                </a:solidFill>
+              </a:rPr>
+              <a:t>•  Reconstruye una descarga con su origen y destino.</a:t>
+            </a:r>
+          </a:p>
+          <a:p>
+            <a:pPr>
+              <a:spcAft>
+                <a:spcPts val="600"/>
+              </a:spcAft>
+            </a:pPr>
+            <a:r>
+              <a:rPr sz="1500">
+                <a:solidFill>
+                  <a:srgbClr val="22282E"/>
+                </a:solidFill>
+              </a:rPr>
+              <a:t>•  Traza la ruta declarada en Received y marca desde qué salto puede confiarse según la infraestructura disponible.</a:t>
+            </a:r>
+          </a:p>
+          <a:p>
+            <a:pPr>
+              <a:spcAft>
+                <a:spcPts val="600"/>
+              </a:spcAft>
+            </a:pPr>
+            <a:r>
+              <a:rPr sz="1500">
+                <a:solidFill>
+                  <a:srgbClr val="22282E"/>
+                </a:solidFill>
+              </a:rPr>
+              <a:t>•  Detecta spoofing con Authentication-Results.</a:t>
+            </a:r>
+          </a:p>
+          <a:p>
+            <a:pPr>
+              <a:spcAft>
+                <a:spcPts val="600"/>
+              </a:spcAft>
+            </a:pPr>
+            <a:r>
+              <a:rPr sz="1500">
+                <a:solidFill>
+                  <a:srgbClr val="22282E"/>
+                </a:solidFill>
+              </a:rPr>
+              <a:t>•  Extrae y hashea un adjunto sin abrirlo.</a:t>
+            </a:r>
+          </a:p>
+        </p:txBody>
+      </p:sp>
+    </p:spTree>
+  </p:cSld>
+  <p:clrMapOvr>
+    <a:masterClrMapping/>
+  </p:clrMapOvr>
+</p:sld>
+</file>
+
+<file path=ppt/slides/slide13.xml><?xml version="1.0" encoding="utf-8"?>
+<p:sld xmlns:a="http://schemas.openxmlformats.org/drawingml/2006/main" xmlns:p="http://schemas.openxmlformats.org/presentationml/2006/main" xmlns:r="http://schemas.openxmlformats.org/officeDocument/2006/relationships">
+  <p:cSld>
+    <p:spTree>
+      <p:nvGrpSpPr>
+        <p:cNvPr id="1" name=""/>
+        <p:cNvGrpSpPr/>
+        <p:nvPr/>
+      </p:nvGrpSpPr>
+      <p:grpSpPr/>
+      <p:sp>
+        <p:nvSpPr>
+          <p:cNvPr id="2" name="TextBox 1"/>
+          <p:cNvSpPr txBox="1"/>
+          <p:nvPr/>
+        </p:nvSpPr>
+        <p:spPr>
+          <a:xfrm>
+            <a:off x="457200" y="320040"/>
+            <a:ext cx="8229600" cy="822960"/>
+          </a:xfrm>
+          <a:prstGeom prst="rect">
+            <a:avLst/>
+          </a:prstGeom>
+          <a:noFill/>
+        </p:spPr>
+        <p:txBody>
+          <a:bodyPr wrap="square">
+            <a:spAutoFit/>
+          </a:bodyPr>
+          <a:lstStyle/>
+          <a:p>
+            <a:r>
+              <a:rPr sz="2600" b="1">
+                <a:solidFill>
+                  <a:srgbClr val="0B3D2E"/>
+                </a:solidFill>
+              </a:rPr>
+              <a:t>📝 Reto verificable</a:t>
+            </a:r>
+          </a:p>
+        </p:txBody>
+      </p:sp>
+      <p:sp>
+        <p:nvSpPr>
+          <p:cNvPr id="3" name="TextBox 2"/>
+          <p:cNvSpPr txBox="1"/>
+          <p:nvPr/>
+        </p:nvSpPr>
+        <p:spPr>
+          <a:xfrm>
+            <a:off x="457200" y="1280160"/>
+            <a:ext cx="8229600" cy="4937760"/>
+          </a:xfrm>
+          <a:prstGeom prst="rect">
+            <a:avLst/>
+          </a:prstGeom>
+          <a:noFill/>
+        </p:spPr>
+        <p:txBody>
+          <a:bodyPr wrap="square">
+            <a:spAutoFit/>
+          </a:bodyPr>
+          <a:lstStyle/>
+          <a:p>
+            <a:pPr>
+              <a:spcAft>
+                <a:spcPts val="600"/>
+              </a:spcAft>
+            </a:pPr>
+            <a:r>
+              <a:rPr sz="1500">
+                <a:solidFill>
+                  <a:srgbClr val="22282E"/>
+                </a:solidFill>
+              </a:rPr>
+              <a:t>•  Analiza un correo sospechoso propio, determina si la evidencia sustenta suplantación de dominio o requiere otra hipótesis, identifica el primer salto confiable y los resultados de SPF/DKIM/DMARC, y…</a:t>
+            </a:r>
+          </a:p>
+          <a:p>
+            <a:pPr>
+              <a:spcAft>
+                <a:spcPts val="600"/>
+              </a:spcAft>
+            </a:pPr>
+            <a:r>
+              <a:rPr sz="1500">
+                <a:solidFill>
+                  <a:srgbClr val="22282E"/>
+                </a:solidFill>
+              </a:rPr>
+              <a:t>•  Criterio de aceptación: reportas (a) el primer salto confiable y los límites para atribuir origen, (b) identidad y resultados evaluados por SPF/DKIM/DMARC, y (c) si los artefactos son compatibles con…</a:t>
+            </a:r>
+          </a:p>
+        </p:txBody>
+      </p:sp>
+    </p:spTree>
+  </p:cSld>
+  <p:clrMapOvr>
+    <a:masterClrMapping/>
+  </p:clrMapOvr>
+</p:sld>
+</file>
+
+<file path=ppt/slides/slide14.xml><?xml version="1.0" encoding="utf-8"?>
+<p:sld xmlns:a="http://schemas.openxmlformats.org/drawingml/2006/main" xmlns:p="http://schemas.openxmlformats.org/presentationml/2006/main" xmlns:r="http://schemas.openxmlformats.org/officeDocument/2006/relationships">
+  <p:cSld>
+    <p:spTree>
+      <p:nvGrpSpPr>
+        <p:cNvPr id="1" name=""/>
+        <p:cNvGrpSpPr/>
+        <p:nvPr/>
+      </p:nvGrpSpPr>
+      <p:grpSpPr/>
+      <p:sp>
+        <p:nvSpPr>
+          <p:cNvPr id="2" name="TextBox 1"/>
+          <p:cNvSpPr txBox="1"/>
+          <p:nvPr/>
+        </p:nvSpPr>
+        <p:spPr>
+          <a:xfrm>
+            <a:off x="457200" y="320040"/>
+            <a:ext cx="8229600" cy="822960"/>
+          </a:xfrm>
+          <a:prstGeom prst="rect">
+            <a:avLst/>
+          </a:prstGeom>
+          <a:noFill/>
+        </p:spPr>
+        <p:txBody>
+          <a:bodyPr wrap="square">
+            <a:spAutoFit/>
+          </a:bodyPr>
+          <a:lstStyle/>
+          <a:p>
+            <a:r>
+              <a:rPr sz="2600" b="1">
+                <a:solidFill>
+                  <a:srgbClr val="0B3D2E"/>
+                </a:solidFill>
+              </a:rPr>
+              <a:t>⚠️ Errores comunes</a:t>
+            </a:r>
+          </a:p>
+        </p:txBody>
+      </p:sp>
+      <p:sp>
+        <p:nvSpPr>
+          <p:cNvPr id="3" name="TextBox 2"/>
+          <p:cNvSpPr txBox="1"/>
+          <p:nvPr/>
+        </p:nvSpPr>
+        <p:spPr>
+          <a:xfrm>
+            <a:off x="457200" y="1280160"/>
+            <a:ext cx="8229600" cy="4937760"/>
+          </a:xfrm>
+          <a:prstGeom prst="rect">
+            <a:avLst/>
+          </a:prstGeom>
+          <a:noFill/>
+        </p:spPr>
+        <p:txBody>
+          <a:bodyPr wrap="square">
+            <a:spAutoFit/>
+          </a:bodyPr>
+          <a:lstStyle/>
+          <a:p>
+            <a:pPr>
+              <a:spcAft>
+                <a:spcPts val="600"/>
+              </a:spcAft>
+            </a:pPr>
+            <a:r>
+              <a:rPr sz="1500">
+                <a:solidFill>
+                  <a:srgbClr val="22282E"/>
+                </a:solidFill>
+              </a:rPr>
+              <a:t>•  database is locked — El navegador está abierto. Trabaja sobre una copia con el navegador cerrado.</a:t>
+            </a:r>
+          </a:p>
+          <a:p>
+            <a:pPr>
+              <a:spcAft>
+                <a:spcPts val="600"/>
+              </a:spcAft>
+            </a:pPr>
+            <a:r>
+              <a:rPr sz="1500">
+                <a:solidFill>
+                  <a:srgbClr val="22282E"/>
+                </a:solidFill>
+              </a:rPr>
+              <a:t>•  Timestamps sin sentido — Épocas distintas (WebKit vs. Unix). Convierte con la fórmula correcta.</a:t>
+            </a:r>
+          </a:p>
+          <a:p>
+            <a:pPr>
+              <a:spcAft>
+                <a:spcPts val="600"/>
+              </a:spcAft>
+            </a:pPr>
+            <a:r>
+              <a:rPr sz="1500">
+                <a:solidFill>
+                  <a:srgbClr val="22282E"/>
+                </a:solidFill>
+              </a:rPr>
+              <a:t>•  Encabezados Received confusos — Léelos de abajo hacia arriba; los de arriba pueden estar falsificados.</a:t>
+            </a:r>
+          </a:p>
+          <a:p>
+            <a:pPr>
+              <a:spcAft>
+                <a:spcPts val="600"/>
+              </a:spcAft>
+            </a:pPr>
+            <a:r>
+              <a:rPr sz="1500">
+                <a:solidFill>
+                  <a:srgbClr val="22282E"/>
+                </a:solidFill>
+              </a:rPr>
+              <a:t>•  SPF pasa pero igual es phishing — SPF valida el sobre, no el From visible. Revisa DKIM y DMARC.</a:t>
+            </a:r>
+          </a:p>
+          <a:p>
+            <a:pPr>
+              <a:spcAft>
+                <a:spcPts val="600"/>
+              </a:spcAft>
+            </a:pPr>
+            <a:r>
+              <a:rPr sz="1500">
+                <a:solidFill>
+                  <a:srgbClr val="22282E"/>
+                </a:solidFill>
+              </a:rPr>
+              <a:t>•  Adjunto peligroso — Nunca lo ejecutes. Solo hashea y analiza en aislamiento.</a:t>
+            </a:r>
+          </a:p>
+        </p:txBody>
+      </p:sp>
+    </p:spTree>
+  </p:cSld>
+  <p:clrMapOvr>
+    <a:masterClrMapping/>
+  </p:clrMapOvr>
+</p:sld>
+</file>
+
+<file path=ppt/slides/slide15.xml><?xml version="1.0" encoding="utf-8"?>
+<p:sld xmlns:a="http://schemas.openxmlformats.org/drawingml/2006/main" xmlns:p="http://schemas.openxmlformats.org/presentationml/2006/main" xmlns:r="http://schemas.openxmlformats.org/officeDocument/2006/relationships">
+  <p:cSld>
+    <p:spTree>
+      <p:nvGrpSpPr>
+        <p:cNvPr id="1" name=""/>
+        <p:cNvGrpSpPr/>
+        <p:nvPr/>
+      </p:nvGrpSpPr>
+      <p:grpSpPr/>
+      <p:sp>
+        <p:nvSpPr>
+          <p:cNvPr id="2" name="TextBox 1"/>
+          <p:cNvSpPr txBox="1"/>
+          <p:nvPr/>
+        </p:nvSpPr>
+        <p:spPr>
+          <a:xfrm>
+            <a:off x="457200" y="320040"/>
+            <a:ext cx="8229600" cy="822960"/>
+          </a:xfrm>
+          <a:prstGeom prst="rect">
+            <a:avLst/>
+          </a:prstGeom>
+          <a:noFill/>
+        </p:spPr>
+        <p:txBody>
+          <a:bodyPr wrap="square">
+            <a:spAutoFit/>
+          </a:bodyPr>
+          <a:lstStyle/>
+          <a:p>
+            <a:r>
+              <a:rPr sz="2600" b="1">
+                <a:solidFill>
+                  <a:srgbClr val="0B3D2E"/>
+                </a:solidFill>
+              </a:rPr>
+              <a:t>❓ Preguntas frecuentes</a:t>
+            </a:r>
+          </a:p>
+        </p:txBody>
+      </p:sp>
+      <p:sp>
+        <p:nvSpPr>
+          <p:cNvPr id="3" name="TextBox 2"/>
+          <p:cNvSpPr txBox="1"/>
+          <p:nvPr/>
+        </p:nvSpPr>
+        <p:spPr>
+          <a:xfrm>
+            <a:off x="457200" y="1280160"/>
+            <a:ext cx="8229600" cy="4937760"/>
+          </a:xfrm>
+          <a:prstGeom prst="rect">
+            <a:avLst/>
+          </a:prstGeom>
+          <a:noFill/>
+        </p:spPr>
+        <p:txBody>
+          <a:bodyPr wrap="square">
+            <a:spAutoFit/>
+          </a:bodyPr>
+          <a:lstStyle/>
+          <a:p>
+            <a:pPr>
+              <a:spcAft>
+                <a:spcPts val="600"/>
+              </a:spcAft>
+            </a:pPr>
+            <a:r>
+              <a:rPr sz="1500">
+                <a:solidFill>
+                  <a:srgbClr val="22282E"/>
+                </a:solidFill>
+              </a:rPr>
+              <a:t>•  ❓ ¿Por qué timestamps raros en Chrome?</a:t>
+            </a:r>
+          </a:p>
+          <a:p>
+            <a:pPr>
+              <a:spcAft>
+                <a:spcPts val="600"/>
+              </a:spcAft>
+            </a:pPr>
+            <a:r>
+              <a:rPr sz="1500">
+                <a:solidFill>
+                  <a:srgbClr val="22282E"/>
+                </a:solidFill>
+              </a:rPr>
+              <a:t>•  Usa la época WebKit: microsegundos desde el 1 de enero de 1601. Hay que convertirla.</a:t>
+            </a:r>
+          </a:p>
+          <a:p>
+            <a:pPr>
+              <a:spcAft>
+                <a:spcPts val="600"/>
+              </a:spcAft>
+            </a:pPr>
+            <a:r>
+              <a:rPr sz="1500">
+                <a:solidFill>
+                  <a:srgbClr val="22282E"/>
+                </a:solidFill>
+              </a:rPr>
+              <a:t>•  ❓ ¿SPF suficiente contra spoofing?</a:t>
+            </a:r>
+          </a:p>
+          <a:p>
+            <a:pPr>
+              <a:spcAft>
+                <a:spcPts val="600"/>
+              </a:spcAft>
+            </a:pPr>
+            <a:r>
+              <a:rPr sz="1500">
+                <a:solidFill>
+                  <a:srgbClr val="22282E"/>
+                </a:solidFill>
+              </a:rPr>
+              <a:t>•  No. SPF valida el remitente del sobre (envelope), no el From que ve el usuario. DMARC alinea ambos; revísalo siempre.</a:t>
+            </a:r>
+          </a:p>
+          <a:p>
+            <a:pPr>
+              <a:spcAft>
+                <a:spcPts val="600"/>
+              </a:spcAft>
+            </a:pPr>
+            <a:r>
+              <a:rPr sz="1500">
+                <a:solidFill>
+                  <a:srgbClr val="22282E"/>
+                </a:solidFill>
+              </a:rPr>
+              <a:t>•  ❓ ¿Puedo recuperar correo borrado?</a:t>
+            </a:r>
+          </a:p>
+          <a:p>
+            <a:pPr>
+              <a:spcAft>
+                <a:spcPts val="600"/>
+              </a:spcAft>
+            </a:pPr>
+            <a:r>
+              <a:rPr sz="1500">
+                <a:solidFill>
+                  <a:srgbClr val="22282E"/>
+                </a:solidFill>
+              </a:rPr>
+              <a:t>•  A veces sí desde PST/OST (elementos recuperables) o desde el espacio no asignado con carving.</a:t>
+            </a:r>
+          </a:p>
+          <a:p>
+            <a:pPr>
+              <a:spcAft>
+                <a:spcPts val="600"/>
+              </a:spcAft>
+            </a:pPr>
+            <a:r>
+              <a:rPr sz="1500">
+                <a:solidFill>
+                  <a:srgbClr val="22282E"/>
+                </a:solidFill>
+              </a:rPr>
+              <a:t>•  ❓ ¿El modo incógnito deja rastro?</a:t>
+            </a:r>
+          </a:p>
+        </p:txBody>
+      </p:sp>
+    </p:spTree>
+  </p:cSld>
+  <p:clrMapOvr>
+    <a:masterClrMapping/>
+  </p:clrMapOvr>
+</p:sld>
+</file>
+
+<file path=ppt/slides/slide16.xml><?xml version="1.0" encoding="utf-8"?>
+<p:sld xmlns:a="http://schemas.openxmlformats.org/drawingml/2006/main" xmlns:p="http://schemas.openxmlformats.org/presentationml/2006/main" xmlns:r="http://schemas.openxmlformats.org/officeDocument/2006/relationships">
+  <p:cSld>
+    <p:spTree>
+      <p:nvGrpSpPr>
+        <p:cNvPr id="1" name=""/>
+        <p:cNvGrpSpPr/>
+        <p:nvPr/>
+      </p:nvGrpSpPr>
+      <p:grpSpPr/>
+      <p:sp>
+        <p:nvSpPr>
+          <p:cNvPr id="2" name="TextBox 1"/>
+          <p:cNvSpPr txBox="1"/>
+          <p:nvPr/>
+        </p:nvSpPr>
+        <p:spPr>
+          <a:xfrm>
+            <a:off x="457200" y="320040"/>
+            <a:ext cx="8229600" cy="822960"/>
+          </a:xfrm>
+          <a:prstGeom prst="rect">
+            <a:avLst/>
+          </a:prstGeom>
+          <a:noFill/>
+        </p:spPr>
+        <p:txBody>
+          <a:bodyPr wrap="square">
+            <a:spAutoFit/>
+          </a:bodyPr>
+          <a:lstStyle/>
+          <a:p>
+            <a:r>
+              <a:rPr sz="2600" b="1">
+                <a:solidFill>
+                  <a:srgbClr val="0B3D2E"/>
+                </a:solidFill>
+              </a:rPr>
+              <a:t>🔗 Referencias verificables y alcance</a:t>
+            </a:r>
+          </a:p>
+        </p:txBody>
+      </p:sp>
+      <p:sp>
+        <p:nvSpPr>
+          <p:cNvPr id="3" name="TextBox 2"/>
+          <p:cNvSpPr txBox="1"/>
+          <p:nvPr/>
+        </p:nvSpPr>
+        <p:spPr>
+          <a:xfrm>
+            <a:off x="457200" y="1280160"/>
+            <a:ext cx="8229600" cy="4937760"/>
+          </a:xfrm>
+          <a:prstGeom prst="rect">
+            <a:avLst/>
+          </a:prstGeom>
+          <a:noFill/>
+        </p:spPr>
+        <p:txBody>
+          <a:bodyPr wrap="square">
+            <a:spAutoFit/>
+          </a:bodyPr>
+          <a:lstStyle/>
+          <a:p>
+            <a:pPr>
+              <a:spcAft>
+                <a:spcPts val="600"/>
+              </a:spcAft>
+            </a:pPr>
+            <a:r>
+              <a:rPr sz="1500">
+                <a:solidFill>
+                  <a:srgbClr val="22282E"/>
+                </a:solidFill>
+              </a:rPr>
+              <a:t>•  Mozilla — Profiles: &lt;https://support.mozilla.org/en-US/kb/profiles-where-firefox-stores-user-data&gt; — documentación oficial sobre datos conservados en un perfil Firefox; las rutas y esquemas pueden…</a:t>
+            </a:r>
+          </a:p>
+          <a:p>
+            <a:pPr>
+              <a:spcAft>
+                <a:spcPts val="600"/>
+              </a:spcAft>
+            </a:pPr>
+            <a:r>
+              <a:rPr sz="1500">
+                <a:solidFill>
+                  <a:srgbClr val="22282E"/>
+                </a:solidFill>
+              </a:rPr>
+              <a:t>•  RFC 5322: &lt;https://www.rfc-editor.org/info/rfc5322/&gt; — especificación del formato de mensajes de Internet y sus campos.</a:t>
+            </a:r>
+          </a:p>
+          <a:p>
+            <a:pPr>
+              <a:spcAft>
+                <a:spcPts val="600"/>
+              </a:spcAft>
+            </a:pPr>
+            <a:r>
+              <a:rPr sz="1500">
+                <a:solidFill>
+                  <a:srgbClr val="22282E"/>
+                </a:solidFill>
+              </a:rPr>
+              <a:t>•  RFC 7208: &lt;https://www.rfc-editor.org/info/rfc7208/&gt; — especificación de SPF y de la identidad que evalúa; no autentica por sí solo el From visible.</a:t>
+            </a:r>
+          </a:p>
+          <a:p>
+            <a:pPr>
+              <a:spcAft>
+                <a:spcPts val="600"/>
+              </a:spcAft>
+            </a:pPr>
+            <a:r>
+              <a:rPr sz="1500">
+                <a:solidFill>
+                  <a:srgbClr val="22282E"/>
+                </a:solidFill>
+              </a:rPr>
+              <a:t>•  RFC 6376: &lt;https://www.rfc-editor.org/info/rfc6376/&gt; — especificación de DKIM y del alcance de las firmas.</a:t>
+            </a:r>
+          </a:p>
+          <a:p>
+            <a:pPr>
+              <a:spcAft>
+                <a:spcPts val="600"/>
+              </a:spcAft>
+            </a:pPr>
+            <a:r>
+              <a:rPr sz="1500">
+                <a:solidFill>
+                  <a:srgbClr val="22282E"/>
+                </a:solidFill>
+              </a:rPr>
+              <a:t>•  RFC 9989: &lt;https://www.rfc-editor.org/info/rfc9989/&gt; — especificación vigente de DMARC para alineación, política y reportes.</a:t>
+            </a:r>
+          </a:p>
+          <a:p>
+            <a:pPr>
+              <a:spcAft>
+                <a:spcPts val="600"/>
+              </a:spcAft>
+            </a:pPr>
+            <a:r>
+              <a:rPr sz="1500">
+                <a:solidFill>
+                  <a:srgbClr val="22282E"/>
+                </a:solidFill>
+              </a:rPr>
+              <a:t>•  Hindsight: &lt;https://github.com/obsidianforensics/hindsight&gt; — herramienta abierta para artefactos Chromium; sus resultados deben verificarse contra las bases originales y la versión analizada.</a:t>
+            </a:r>
+          </a:p>
+          <a:p>
+            <a:pPr>
+              <a:spcAft>
+                <a:spcPts val="600"/>
+              </a:spcAft>
+            </a:pPr>
+            <a:r>
+              <a:rPr sz="1500">
+                <a:solidFill>
+                  <a:srgbClr val="22282E"/>
+                </a:solidFill>
+              </a:rPr>
+              <a:t>•  libpff: &lt;https://github.com/libyal/libpff&gt; — proyecto abierto para PST/OST; la extracción no sustituye la preservación del contenedor original.</a:t>
+            </a:r>
+          </a:p>
+        </p:txBody>
+      </p:sp>
+    </p:spTree>
+  </p:cSld>
+  <p:clrMapOvr>
+    <a:masterClrMapping/>
+  </p:clrMapOvr>
+</p:sld>
+</file>
+
+<file path=ppt/slides/slide17.xml><?xml version="1.0" encoding="utf-8"?>
+<p:sld xmlns:a="http://schemas.openxmlformats.org/drawingml/2006/main" xmlns:p="http://schemas.openxmlformats.org/presentationml/2006/main" xmlns:r="http://schemas.openxmlformats.org/officeDocument/2006/relationships">
+  <p:cSld>
+    <p:spTree>
+      <p:nvGrpSpPr>
+        <p:cNvPr id="1" name=""/>
+        <p:cNvGrpSpPr/>
+        <p:nvPr/>
+      </p:nvGrpSpPr>
+      <p:grpSpPr/>
+      <p:sp>
+        <p:nvSpPr>
+          <p:cNvPr id="2" name="TextBox 1"/>
+          <p:cNvSpPr txBox="1"/>
+          <p:nvPr/>
+        </p:nvSpPr>
+        <p:spPr>
+          <a:xfrm>
+            <a:off x="457200" y="274320"/>
+            <a:ext cx="8229600" cy="640080"/>
+          </a:xfrm>
+          <a:prstGeom prst="rect">
+            <a:avLst/>
+          </a:prstGeom>
+          <a:noFill/>
+        </p:spPr>
+        <p:txBody>
+          <a:bodyPr wrap="square">
+            <a:spAutoFit/>
+          </a:bodyPr>
+          <a:lstStyle/>
+          <a:p>
+            <a:r>
+              <a:rPr sz="2200" b="1">
+                <a:solidFill>
+                  <a:srgbClr val="0B3D2E"/>
+                </a:solidFill>
+              </a:rPr>
+              <a:t>Diagrama de la clase</a:t>
+            </a:r>
+          </a:p>
+        </p:txBody>
+      </p:sp>
+      <p:pic>
+        <p:nvPicPr>
+          <p:cNvPr id="3" name="Picture 2" descr="3efd74321c76d3a7.png"/>
+          <p:cNvPicPr>
+            <a:picLocks noChangeAspect="1"/>
+          </p:cNvPicPr>
+          <p:nvPr/>
+        </p:nvPicPr>
+        <p:blipFill>
+          <a:blip r:embed="rId2"/>
+          <a:stretch>
+            <a:fillRect/>
+          </a:stretch>
+        </p:blipFill>
+        <p:spPr>
+          <a:xfrm>
+            <a:off x="457200" y="2320932"/>
+            <a:ext cx="8229600" cy="2856215"/>
+          </a:xfrm>
+          <a:prstGeom prst="rect">
+            <a:avLst/>
+          </a:prstGeom>
+        </p:spPr>
+      </p:pic>
     </p:spTree>
   </p:cSld>
   <p:clrMapOvr>
@@ -3698,7 +4389,7 @@
                   <a:srgbClr val="22282E"/>
                 </a:solidFill>
               </a:rPr>
-              <a:t>•  Aprender a extraer y analizar la actividad web y de correo: historial, cookies, descargas, caché y sesiones de navegadores (Chrome, Firefox, Edge), y encabezados, adjuntos y trazabilidad de correos. Al terminar podrás reconstruir la navegación de un usuario y analizar el origen real de un correo de phishing.</a:t>
+              <a:t>•  Aprender a extraer y analizar actividad web y de correo: historial, cookies, descargas, caché y sesiones de navegadores (Chrome, Firefox, Edge), y encabezados, adjuntos y trazabilidad de mensajes. Al…</a:t>
             </a:r>
           </a:p>
         </p:txBody>
@@ -3832,7 +4523,7 @@
                   <a:srgbClr val="22282E"/>
                 </a:solidFill>
               </a:rPr>
-              <a:t>•  Analizar encabezados de correo para trazar el origen real.</a:t>
+              <a:t>•  Analizar encabezados de correo para delimitar la ruta confiable y sus límites.</a:t>
             </a:r>
           </a:p>
           <a:p>
@@ -4092,7 +4783,7 @@
                   <a:srgbClr val="0B3D2E"/>
                 </a:solidFill>
               </a:rPr>
-              <a:t>📖 Definiciones y características</a:t>
+              <a:t>🧠 Explicación en profundidad</a:t>
             </a:r>
           </a:p>
         </p:txBody>
@@ -4130,97 +4821,97 @@
                   <a:srgbClr val="22282E"/>
                 </a:solidFill>
               </a:rPr>
-              <a:t>•  History (Chrome): SQLite con visitas, tiempos y descargas. Característica: los timestamps usan época WebKit (microsegundos desde 1601).</a:t>
-            </a:r>
-          </a:p>
-          <a:p>
-            <a:pPr>
-              <a:spcAft>
-                <a:spcPts val="600"/>
-              </a:spcAft>
-            </a:pPr>
-            <a:r>
-              <a:rPr sz="1500">
-                <a:solidFill>
-                  <a:srgbClr val="22282E"/>
-                </a:solidFill>
-              </a:rPr>
-              <a:t>•  places.sqlite (Firefox): base de historial y marcadores. Característica: timestamps en microsegundos desde 1970.</a:t>
-            </a:r>
-          </a:p>
-          <a:p>
-            <a:pPr>
-              <a:spcAft>
-                <a:spcPts val="600"/>
-              </a:spcAft>
-            </a:pPr>
-            <a:r>
-              <a:rPr sz="1500">
-                <a:solidFill>
-                  <a:srgbClr val="22282E"/>
-                </a:solidFill>
-              </a:rPr>
-              <a:t>•  Cookies: sesiones y autenticación persistidas. Característica: pueden probar acceso a un servicio.</a:t>
-            </a:r>
-          </a:p>
-          <a:p>
-            <a:pPr>
-              <a:spcAft>
-                <a:spcPts val="600"/>
-              </a:spcAft>
-            </a:pPr>
-            <a:r>
-              <a:rPr sz="1500">
-                <a:solidFill>
-                  <a:srgbClr val="22282E"/>
-                </a:solidFill>
-              </a:rPr>
-              <a:t>•  PST/OST: contenedores de Outlook. Característica: PST es exportable; OST es la caché local.</a:t>
-            </a:r>
-          </a:p>
-          <a:p>
-            <a:pPr>
-              <a:spcAft>
-                <a:spcPts val="600"/>
-              </a:spcAft>
-            </a:pPr>
-            <a:r>
-              <a:rPr sz="1500">
-                <a:solidFill>
-                  <a:srgbClr val="22282E"/>
-                </a:solidFill>
-              </a:rPr>
-              <a:t>•  MBOX/EML: formatos de correo de texto. Característica: EML es un mensaje individual con encabezados completos.</a:t>
-            </a:r>
-          </a:p>
-          <a:p>
-            <a:pPr>
-              <a:spcAft>
-                <a:spcPts val="600"/>
-              </a:spcAft>
-            </a:pPr>
-            <a:r>
-              <a:rPr sz="1500">
-                <a:solidFill>
-                  <a:srgbClr val="22282E"/>
-                </a:solidFill>
-              </a:rPr>
-              <a:t>•  Encabezados Received: cadena de servidores por los que pasó el correo. Característica: se leen de abajo hacia arriba para trazar el origen.</a:t>
-            </a:r>
-          </a:p>
-          <a:p>
-            <a:pPr>
-              <a:spcAft>
-                <a:spcPts val="600"/>
-              </a:spcAft>
-            </a:pPr>
-            <a:r>
-              <a:rPr sz="1500">
-                <a:solidFill>
-                  <a:srgbClr val="22282E"/>
-                </a:solidFill>
-              </a:rPr>
-              <a:t>•  SPF/DKIM/DMARC: mecanismos de autenticación del remitente. Característica: sus fallos delatan spoofing.</a:t>
+              <a:t>•  Navegadores y correo mezclan contenido local, sincronizado y remoto. Historial, cookies, caché, descargas y sesiones dependen de perfil y versión; un URL en historial no prueba lectura consciente. En…</a:t>
+            </a:r>
+          </a:p>
+          <a:p>
+            <a:pPr>
+              <a:spcAft>
+                <a:spcPts val="600"/>
+              </a:spcAft>
+            </a:pPr>
+            <a:r>
+              <a:rPr sz="1500">
+                <a:solidFill>
+                  <a:srgbClr val="22282E"/>
+                </a:solidFill>
+              </a:rPr>
+              <a:t>•  Se preserva mensaje original en su formato, no solo captura de pantalla. Received se lee de abajo hacia arriba con cautela; SPF, DKIM y DMARC expresan controles diferentes y resultados ligados al…</a:t>
+            </a:r>
+          </a:p>
+          <a:p>
+            <a:pPr>
+              <a:spcAft>
+                <a:spcPts val="600"/>
+              </a:spcAft>
+            </a:pPr>
+            <a:r>
+              <a:rPr sz="1500">
+                <a:solidFill>
+                  <a:srgbClr val="22282E"/>
+                </a:solidFill>
+              </a:rPr>
+              <a:t>•  Chrome, Edge y Firefox distribuyen actividad entre bases SQLite, archivos de sesión, caché y preferencias. Copiar solo History puede omitir transacciones pendientes en archivos -wal y -shm; abrir el…</a:t>
+            </a:r>
+          </a:p>
+          <a:p>
+            <a:pPr>
+              <a:spcAft>
+                <a:spcPts val="600"/>
+              </a:spcAft>
+            </a:pPr>
+            <a:r>
+              <a:rPr sz="1500">
+                <a:solidFill>
+                  <a:srgbClr val="22282E"/>
+                </a:solidFill>
+              </a:rPr>
+              <a:t>•  Una URL puede aparecer por navegación consciente, redirección, precarga, sincronización o recurso embebido. Una cookie indica que un navegador almacenó datos para un dominio, no que el titular de la…</a:t>
+            </a:r>
+          </a:p>
+          <a:p>
+            <a:pPr>
+              <a:spcAft>
+                <a:spcPts val="600"/>
+              </a:spcAft>
+            </a:pPr>
+            <a:r>
+              <a:rPr sz="1500">
+                <a:solidFill>
+                  <a:srgbClr val="22282E"/>
+                </a:solidFill>
+              </a:rPr>
+              <a:t>•  RFC 5322 define la sintaxis del mensaje de Internet, mientras MIME estructura cuerpos y adjuntos. El .eml original conserva campos que una captura de pantalla pierde. Cada servidor de transporte…</a:t>
+            </a:r>
+          </a:p>
+          <a:p>
+            <a:pPr>
+              <a:spcAft>
+                <a:spcPts val="600"/>
+              </a:spcAft>
+            </a:pPr>
+            <a:r>
+              <a:rPr sz="1500">
+                <a:solidFill>
+                  <a:srgbClr val="22282E"/>
+                </a:solidFill>
+              </a:rPr>
+              <a:t>•  Se separan From visible, Return-Path, dominio de DKIM, Message-ID, fechas y Authentication-Results. La IP hallada en la cadena puede identificar un relé o proveedor, no el dispositivo de la persona.…</a:t>
+            </a:r>
+          </a:p>
+          <a:p>
+            <a:pPr>
+              <a:spcAft>
+                <a:spcPts val="600"/>
+              </a:spcAft>
+            </a:pPr>
+            <a:r>
+              <a:rPr sz="1500">
+                <a:solidFill>
+                  <a:srgbClr val="22282E"/>
+                </a:solidFill>
+              </a:rPr>
+              <a:t>•  SPF autoriza hosts para el dominio usado en la identidad del sobre; DKIM verifica una firma y las partes cubiertas del mensaje; DMARC evalúa alineación del dominio visible con SPF o DKIM y aplica una…</a:t>
             </a:r>
           </a:p>
         </p:txBody>
@@ -4271,7 +4962,7 @@
                   <a:srgbClr val="0B3D2E"/>
                 </a:solidFill>
               </a:rPr>
-              <a:t>🧰 Herramientas y preparación</a:t>
+              <a:t>📔 Glosario</a:t>
             </a:r>
           </a:p>
         </p:txBody>
@@ -4309,37 +5000,97 @@
                   <a:srgbClr val="22282E"/>
                 </a:solidFill>
               </a:rPr>
-              <a:t>•  Navegadores: DB Browser for SQLite, herramientas de Eric Zimmerman, Hindsight (Chrome), nirsoft BrowsingHistoryView.</a:t>
-            </a:r>
-          </a:p>
-          <a:p>
-            <a:pPr>
-              <a:spcAft>
-                <a:spcPts val="600"/>
-              </a:spcAft>
-            </a:pPr>
-            <a:r>
-              <a:rPr sz="1500">
-                <a:solidFill>
-                  <a:srgbClr val="22282E"/>
-                </a:solidFill>
-              </a:rPr>
-              <a:t>•  Correo: libpff (PST), readpst, un visor de EML, y análisis manual de encabezados.</a:t>
-            </a:r>
-          </a:p>
-          <a:p>
-            <a:pPr>
-              <a:spcAft>
-                <a:spcPts val="600"/>
-              </a:spcAft>
-            </a:pPr>
-            <a:r>
-              <a:rPr sz="1500">
-                <a:solidFill>
-                  <a:srgbClr val="22282E"/>
-                </a:solidFill>
-              </a:rPr>
-              <a:t>•  Entorno: usa perfiles de navegador y correos PROPIOS. Si analizas un correo de phishing real recibido por ti, hazlo en entorno aislado y no abras los adjuntos.</a:t>
+              <a:t>•  Browser profile: conjunto de datos de un usuario/navegador.</a:t>
+            </a:r>
+          </a:p>
+          <a:p>
+            <a:pPr>
+              <a:spcAft>
+                <a:spcPts val="600"/>
+              </a:spcAft>
+            </a:pPr>
+            <a:r>
+              <a:rPr sz="1500">
+                <a:solidFill>
+                  <a:srgbClr val="22282E"/>
+                </a:solidFill>
+              </a:rPr>
+              <a:t>•  Cache: copia local de recursos recuperados.</a:t>
+            </a:r>
+          </a:p>
+          <a:p>
+            <a:pPr>
+              <a:spcAft>
+                <a:spcPts val="600"/>
+              </a:spcAft>
+            </a:pPr>
+            <a:r>
+              <a:rPr sz="1500">
+                <a:solidFill>
+                  <a:srgbClr val="22282E"/>
+                </a:solidFill>
+              </a:rPr>
+              <a:t>•  Cookie: dato asociado a una sesión o sitio.</a:t>
+            </a:r>
+          </a:p>
+          <a:p>
+            <a:pPr>
+              <a:spcAft>
+                <a:spcPts val="600"/>
+              </a:spcAft>
+            </a:pPr>
+            <a:r>
+              <a:rPr sz="1500">
+                <a:solidFill>
+                  <a:srgbClr val="22282E"/>
+                </a:solidFill>
+              </a:rPr>
+              <a:t>•  MIME: estructura de contenido de correo.</a:t>
+            </a:r>
+          </a:p>
+          <a:p>
+            <a:pPr>
+              <a:spcAft>
+                <a:spcPts val="600"/>
+              </a:spcAft>
+            </a:pPr>
+            <a:r>
+              <a:rPr sz="1500">
+                <a:solidFill>
+                  <a:srgbClr val="22282E"/>
+                </a:solidFill>
+              </a:rPr>
+              <a:t>•  Received: salto añadido por servidores de transporte.</a:t>
+            </a:r>
+          </a:p>
+          <a:p>
+            <a:pPr>
+              <a:spcAft>
+                <a:spcPts val="600"/>
+              </a:spcAft>
+            </a:pPr>
+            <a:r>
+              <a:rPr sz="1500">
+                <a:solidFill>
+                  <a:srgbClr val="22282E"/>
+                </a:solidFill>
+              </a:rPr>
+              <a:t>•  DKIM: firma de dominio sobre partes del mensaje.</a:t>
+            </a:r>
+          </a:p>
+          <a:p>
+            <a:pPr>
+              <a:spcAft>
+                <a:spcPts val="600"/>
+              </a:spcAft>
+            </a:pPr>
+            <a:r>
+              <a:rPr sz="1500">
+                <a:solidFill>
+                  <a:srgbClr val="22282E"/>
+                </a:solidFill>
+              </a:rPr>
+              <a:t>•  Mark-of-the-Web: marca de procedencia de zona en Windows.</a:t>
             </a:r>
           </a:p>
         </p:txBody>
@@ -4390,7 +5141,7 @@
                   <a:srgbClr val="0B3D2E"/>
                 </a:solidFill>
               </a:rPr>
-              <a:t>🧪 Laboratorio guiado</a:t>
+              <a:t>📖 Definiciones y características</a:t>
             </a:r>
           </a:p>
         </p:txBody>
@@ -4428,97 +5179,97 @@
                   <a:srgbClr val="22282E"/>
                 </a:solidFill>
               </a:rPr>
-              <a:t>•  Copia (no abras el navegador en vivo) la base de historial de Chrome:</a:t>
-            </a:r>
-          </a:p>
-          <a:p>
-            <a:pPr>
-              <a:spcAft>
-                <a:spcPts val="600"/>
-              </a:spcAft>
-            </a:pPr>
-            <a:r>
-              <a:rPr sz="1500">
-                <a:solidFill>
-                  <a:srgbClr val="22282E"/>
-                </a:solidFill>
-              </a:rPr>
-              <a:t>•  Windows: %LOCALAPPDATA%\Google\Chrome\User Data\Default\History.</a:t>
-            </a:r>
-          </a:p>
-          <a:p>
-            <a:pPr>
-              <a:spcAft>
-                <a:spcPts val="600"/>
-              </a:spcAft>
-            </a:pPr>
-            <a:r>
-              <a:rPr sz="1500">
-                <a:solidFill>
-                  <a:srgbClr val="22282E"/>
-                </a:solidFill>
-              </a:rPr>
-              <a:t>•  Explora el historial con SQL:</a:t>
-            </a:r>
-          </a:p>
-          <a:p>
-            <a:pPr>
-              <a:spcAft>
-                <a:spcPts val="600"/>
-              </a:spcAft>
-            </a:pPr>
-            <a:r>
-              <a:rPr sz="1500">
-                <a:solidFill>
-                  <a:srgbClr val="22282E"/>
-                </a:solidFill>
-              </a:rPr>
-              <a:t>•  SELECT url, title, visitcount, lastvisittime FROM urls ORDER BY lastvisittime DESC;</a:t>
-            </a:r>
-          </a:p>
-          <a:p>
-            <a:pPr>
-              <a:spcAft>
-                <a:spcPts val="600"/>
-              </a:spcAft>
-            </a:pPr>
-            <a:r>
-              <a:rPr sz="1500">
-                <a:solidFill>
-                  <a:srgbClr val="22282E"/>
-                </a:solidFill>
-              </a:rPr>
-              <a:t>•  Convierte los timestamps WebKit a fecha legible (recuerda: microsegundos desde 1601).</a:t>
-            </a:r>
-          </a:p>
-          <a:p>
-            <a:pPr>
-              <a:spcAft>
-                <a:spcPts val="600"/>
-              </a:spcAft>
-            </a:pPr>
-            <a:r>
-              <a:rPr sz="1500">
-                <a:solidFill>
-                  <a:srgbClr val="22282E"/>
-                </a:solidFill>
-              </a:rPr>
-              <a:t>•  Analiza Firefox:</a:t>
-            </a:r>
-          </a:p>
-          <a:p>
-            <a:pPr>
-              <a:spcAft>
-                <a:spcPts val="600"/>
-              </a:spcAft>
-            </a:pPr>
-            <a:r>
-              <a:rPr sz="1500">
-                <a:solidFill>
-                  <a:srgbClr val="22282E"/>
-                </a:solidFill>
-              </a:rPr>
-              <a:t>•  SELECT url, title, visitcount FROM mozplaces ORDER BY lastvisitdate DESC;</a:t>
+              <a:t>•  History (Chrome): SQLite con visitas, tiempos y descargas. Característica: los timestamps usan época WebKit (microsegundos desde 1601).</a:t>
+            </a:r>
+          </a:p>
+          <a:p>
+            <a:pPr>
+              <a:spcAft>
+                <a:spcPts val="600"/>
+              </a:spcAft>
+            </a:pPr>
+            <a:r>
+              <a:rPr sz="1500">
+                <a:solidFill>
+                  <a:srgbClr val="22282E"/>
+                </a:solidFill>
+              </a:rPr>
+              <a:t>•  places.sqlite (Firefox): base de historial y marcadores. Característica: timestamps en microsegundos desde 1970.</a:t>
+            </a:r>
+          </a:p>
+          <a:p>
+            <a:pPr>
+              <a:spcAft>
+                <a:spcPts val="600"/>
+              </a:spcAft>
+            </a:pPr>
+            <a:r>
+              <a:rPr sz="1500">
+                <a:solidFill>
+                  <a:srgbClr val="22282E"/>
+                </a:solidFill>
+              </a:rPr>
+              <a:t>•  Cookies: datos asociados por el navegador a un origen o sesión. Característica: prueban almacenamiento local, pero su significado y atribución dependen del tipo, cifrado y contexto.</a:t>
+            </a:r>
+          </a:p>
+          <a:p>
+            <a:pPr>
+              <a:spcAft>
+                <a:spcPts val="600"/>
+              </a:spcAft>
+            </a:pPr>
+            <a:r>
+              <a:rPr sz="1500">
+                <a:solidFill>
+                  <a:srgbClr val="22282E"/>
+                </a:solidFill>
+              </a:rPr>
+              <a:t>•  PST/OST: contenedores de Outlook. Característica: PST es exportable; OST es la caché local.</a:t>
+            </a:r>
+          </a:p>
+          <a:p>
+            <a:pPr>
+              <a:spcAft>
+                <a:spcPts val="600"/>
+              </a:spcAft>
+            </a:pPr>
+            <a:r>
+              <a:rPr sz="1500">
+                <a:solidFill>
+                  <a:srgbClr val="22282E"/>
+                </a:solidFill>
+              </a:rPr>
+              <a:t>•  MBOX/EML: formatos de correo de texto. Característica: EML es un mensaje individual con encabezados completos.</a:t>
+            </a:r>
+          </a:p>
+          <a:p>
+            <a:pPr>
+              <a:spcAft>
+                <a:spcPts val="600"/>
+              </a:spcAft>
+            </a:pPr>
+            <a:r>
+              <a:rPr sz="1500">
+                <a:solidFill>
+                  <a:srgbClr val="22282E"/>
+                </a:solidFill>
+              </a:rPr>
+              <a:t>•  Encabezados Received: campos agregados durante el transporte. Característica: se examinan desde el primer salto confiable y no todos poseen igual confianza.</a:t>
+            </a:r>
+          </a:p>
+          <a:p>
+            <a:pPr>
+              <a:spcAft>
+                <a:spcPts val="600"/>
+              </a:spcAft>
+            </a:pPr>
+            <a:r>
+              <a:rPr sz="1500">
+                <a:solidFill>
+                  <a:srgbClr val="22282E"/>
+                </a:solidFill>
+              </a:rPr>
+              <a:t>•  SPF/DKIM/DMARC: mecanismos complementarios de autorización, firma y alineación de dominios. Característica: sus resultados deben interpretarse con identidad evaluada, política y receptor.</a:t>
             </a:r>
           </a:p>
         </p:txBody>
@@ -4569,7 +5320,7 @@
                   <a:srgbClr val="0B3D2E"/>
                 </a:solidFill>
               </a:rPr>
-              <a:t>✍️ Ejercicios</a:t>
+              <a:t>🔍 Caso razonado — del mensaje a la ejecución</a:t>
             </a:r>
           </a:p>
         </p:txBody>
@@ -4607,82 +5358,22 @@
                   <a:srgbClr val="22282E"/>
                 </a:solidFill>
               </a:rPr>
-              <a:t>•  Convierte tres timestamps WebKit a fecha UTC legible.</a:t>
-            </a:r>
-          </a:p>
-          <a:p>
-            <a:pPr>
-              <a:spcAft>
-                <a:spcPts val="600"/>
-              </a:spcAft>
-            </a:pPr>
-            <a:r>
-              <a:rPr sz="1500">
-                <a:solidFill>
-                  <a:srgbClr val="22282E"/>
-                </a:solidFill>
-              </a:rPr>
-              <a:t>•  Lista las diez URLs más visitadas de tu perfil.</a:t>
-            </a:r>
-          </a:p>
-          <a:p>
-            <a:pPr>
-              <a:spcAft>
-                <a:spcPts val="600"/>
-              </a:spcAft>
-            </a:pPr>
-            <a:r>
-              <a:rPr sz="1500">
-                <a:solidFill>
-                  <a:srgbClr val="22282E"/>
-                </a:solidFill>
-              </a:rPr>
-              <a:t>•  Reconstruye una descarga con su origen y destino.</a:t>
-            </a:r>
-          </a:p>
-          <a:p>
-            <a:pPr>
-              <a:spcAft>
-                <a:spcPts val="600"/>
-              </a:spcAft>
-            </a:pPr>
-            <a:r>
-              <a:rPr sz="1500">
-                <a:solidFill>
-                  <a:srgbClr val="22282E"/>
-                </a:solidFill>
-              </a:rPr>
-              <a:t>•  Traza el origen real de un correo leyendo sus Received.</a:t>
-            </a:r>
-          </a:p>
-          <a:p>
-            <a:pPr>
-              <a:spcAft>
-                <a:spcPts val="600"/>
-              </a:spcAft>
-            </a:pPr>
-            <a:r>
-              <a:rPr sz="1500">
-                <a:solidFill>
-                  <a:srgbClr val="22282E"/>
-                </a:solidFill>
-              </a:rPr>
-              <a:t>•  Detecta spoofing con Authentication-Results.</a:t>
-            </a:r>
-          </a:p>
-          <a:p>
-            <a:pPr>
-              <a:spcAft>
-                <a:spcPts val="600"/>
-              </a:spcAft>
-            </a:pPr>
-            <a:r>
-              <a:rPr sz="1500">
-                <a:solidFill>
-                  <a:srgbClr val="22282E"/>
-                </a:solidFill>
-              </a:rPr>
-              <a:t>•  Extrae y hashea un adjunto sin abrirlo.</a:t>
+              <a:t>•  Un .eml presenta como remitente al área financiera. El primer Received confiable muestra entrega desde un servicio externo; SPF falla para la identidad del sobre, DKIM no existe y DMARC falla por…</a:t>
+            </a:r>
+          </a:p>
+          <a:p>
+            <a:pPr>
+              <a:spcAft>
+                <a:spcPts val="600"/>
+              </a:spcAft>
+            </a:pPr>
+            <a:r>
+              <a:rPr sz="1500">
+                <a:solidFill>
+                  <a:srgbClr val="22282E"/>
+                </a:solidFill>
+              </a:rPr>
+              <a:t>•  La narrativa conserva la separación: los encabezados explican autenticación y transporte; el navegador apoya visita y descarga; el endpoint apoya ejecución. Si DMARC hubiera pasado, no se descartaría…</a:t>
             </a:r>
           </a:p>
         </p:txBody>
@@ -4733,7 +5424,7 @@
                   <a:srgbClr val="0B3D2E"/>
                 </a:solidFill>
               </a:rPr>
-              <a:t>📝 Reto verificable</a:t>
+              <a:t>✅ Criterio de dominio</a:t>
             </a:r>
           </a:p>
         </p:txBody>
@@ -4771,22 +5462,7 @@
                   <a:srgbClr val="22282E"/>
                 </a:solidFill>
               </a:rPr>
-              <a:t>•  Analiza un correo de phishing propio y demuestra que el remitente está suplantado, identificando el servidor de origen real y el resultado de SPF/DKIM/DMARC, y correlaciona una URL del correo con el historial del navegador.</a:t>
-            </a:r>
-          </a:p>
-          <a:p>
-            <a:pPr>
-              <a:spcAft>
-                <a:spcPts val="600"/>
-              </a:spcAft>
-            </a:pPr>
-            <a:r>
-              <a:rPr sz="1500">
-                <a:solidFill>
-                  <a:srgbClr val="22282E"/>
-                </a:solidFill>
-              </a:rPr>
-              <a:t>•  Criterio de aceptación: reportas (a) el servidor de origen real desde la cadena Received, (b) los resultados de SPF/DKIM/DMARC que prueban el spoofing, y (c) evidencia de si el usuario visitó la URL maliciosa (o no) según el historial.</a:t>
+              <a:t>•  Dominas la clase cuando adquieres un perfil sin alterar su estado lógico, incluyes archivos auxiliares de SQLite cuando corresponda, conviertes tiempos conservando su época, analizas un mensaje desde…</a:t>
             </a:r>
           </a:p>
         </p:txBody>
